--- a/decks/hist-dictatorship/hist-dictatorship_ch3_nazi-dictatorship.pptx
+++ b/decks/hist-dictatorship/hist-dictatorship_ch3_nazi-dictatorship.pptx
@@ -127,31 +127,31 @@
   <p:extLst>
     <p:ext uri="{521415D9-36F7-43E2-AB2F-B90AF26B5E84}">
       <p14:sectionLst xmlns:p14="http://schemas.microsoft.com/office/powerpoint/2010/main">
-        <p14:section name="Opening" id="{7c5079df-ef5a-c5ec-8575-4b25f60ea94e}">
+        <p14:section name="Opening" id="{5ed55ab7-1cba-001e-5eba-777dba44eddc}">
           <p14:sldIdLst>
             <p14:sldId id="256"/>
           </p14:sldIdLst>
         </p14:section>
-        <p14:section name="Gate" id="{5f4ebd09-98f9-33d3-3b52-93fe407907bb}">
+        <p14:section name="Gate" id="{8c4aaa3b-46be-1843-16a2-03cd8ac4d8d1}">
           <p14:sldIdLst>
             <p14:sldId id="257"/>
             <p14:sldId id="258"/>
             <p14:sldId id="259"/>
           </p14:sldIdLst>
         </p14:section>
-        <p14:section name="Pre-teach" id="{3f65ede3-b7ca-b26e-6cd8-d91a3529abc0}">
+        <p14:section name="Pre-teach" id="{59db1c83-6dfe-348a-2927-e587d54f02ca}">
           <p14:sldIdLst>
             <p14:sldId id="260"/>
             <p14:sldId id="261"/>
           </p14:sldIdLst>
         </p14:section>
-        <p14:section name="Read-along" id="{cead4932-badc-28bd-2564-ea2588b5746b}">
+        <p14:section name="Read-along" id="{c18eea4e-a1d6-af50-f92b-1fc1c7ad43bb}">
           <p14:sldIdLst>
             <p14:sldId id="262"/>
             <p14:sldId id="263"/>
           </p14:sldIdLst>
         </p14:section>
-        <p14:section name="Teach" id="{96e86fff-fb19-d6f9-3cec-bb6626d8b5e7}">
+        <p14:section name="Teach" id="{a311e0a0-3940-6e98-f3f2-4f6dac2ab6c0}">
           <p14:sldIdLst>
             <p14:sldId id="264"/>
             <p14:sldId id="265"/>
@@ -160,7 +160,7 @@
             <p14:sldId id="268"/>
           </p14:sldIdLst>
         </p14:section>
-        <p14:section name="Routes" id="{6a0e990b-83f9-22c8-e017-88c6662c4960}">
+        <p14:section name="Routes" id="{d1824028-d919-6c45-4d33-4088b73d2fe8}">
           <p14:sldIdLst>
             <p14:sldId id="269"/>
             <p14:sldId id="270"/>
@@ -168,12 +168,12 @@
             <p14:sldId id="272"/>
           </p14:sldIdLst>
         </p14:section>
-        <p14:section name="Close" id="{d9e2d096-5c51-09e7-b429-1f6ae9bc24a5}">
+        <p14:section name="Close" id="{fbfcc060-bf2b-b127-ff68-0feaee4f2c14}">
           <p14:sldIdLst>
             <p14:sldId id="273"/>
           </p14:sldIdLst>
         </p14:section>
-        <p14:section name="Answers" id="{60cb4f04-7ea1-1957-dead-58276bd2d615}">
+        <p14:section name="Answers" id="{4f271404-7c16-f10c-92dc-7c3ba47a9291}">
           <p14:sldIdLst>
             <p14:sldId id="274"/>
             <p14:sldId id="275"/>
@@ -956,7 +956,7 @@
               <a:t>Teach — The Night of the Long Knives, and the title of Führer. Say it in your own words, then check understanding with a quick question: ask a pupil from the pre-teach group first, since they met these words and ideas before the lesson. Pupils try to recall before you re-explain.
 Hitler's last two rivals were inside his own party and inside the army. Many Nazis were demanding that the party carry out its socialist promises and take over the armed forces. Hitler could not afford to annoy either the businessmen who funded him or the generals he needed, so he destroyed the demand instead of meeting it.
 On the Night of the Long Knives in June 1934, the SS, Hitler's personal bodyguard, murdered around 400 members of the Nazi Party. This destroyed all opposition to Hitler within the party and handed enormous power to the SS. It also showed the rest of the world what sort of ruler Germany now had.
-Then, on 19 August 1934, President Hindenburg died. Hitler declared himself Führer in August 1934, taking the roles of president, chancellor and head of the army together. Members of the armed forces had to swear a personal oath of allegiance not to Germany but to Hitler himself. From that point his power was unlimited and absolute, and there was no one left who could challenge it.
+Then, on 19 August 1934, President Hindenburg died. Hitler declared himself Führer in August 1934, taking the roles of president, chancellor and head of the army together. Every soldier, sailor and airman was then made to swear loyalty to Hitler in person rather than to the country. From that point his power was unlimited and absolute, and there was no one left who could challenge it.
 Tip: Learn the sequence as a removal of rivals: communists in February, parliament in March, the party in June, the army in August.</a:t>
             </a:r>
             <a:endParaRPr lang="en-US" dirty="0"/>
@@ -2445,7 +2445,7 @@
               <a:rPr lang="en-US" dirty="0"/>
               <a:t>Teach — Using democracy to destroy democracy. Say it in your own words, then check understanding with a quick question: ask a pupil from the pre-teach group first, since they met these words and ideas before the lesson. Pupils try to recall before you re-explain.
 Hitler and the Nazis hated democracy and the free, open society it had created in Germany. Their first plan had been to take power by force, but that plan collapsed with the Munich Putsch of 1923 and sent Hitler to prison. After 1923 he changed strategy and set about turning the Nazi Party into an electable party instead.
-The plan from then on was the one your lesson puts in a single sentence: use the democratic system to gain power, and then destroy German democracy from the inside. That is why the Nazis fought elections they privately despised, and why Hitler accepted an appointment rather than seizing the government.
+The plan from then on was the one your lesson puts in a single sentence: win power by election, and then pull German democracy down from within. That is why the Nazis fought elections they privately despised, and why Hitler accepted an appointment rather than seizing the government.
 By the start of 1933 the Nazis had become so popular, and the other parties so unpopular, that Germany's political leaders felt they had no choice but to let Hitler in. The President did not want him as Chancellor and had no other options left after years of failure since 1929. Hitler took the post, and began dismantling German democracy almost at once.
 Tip: The phrase to remember is from the inside. Hitler did not overthrow German democracy; he was invited into it and then took it apart.</a:t>
             </a:r>
@@ -17363,7 +17363,7 @@
               <a:buNone/>
             </a:pPr>
             <a:r>
-              <a:rPr lang="en-US" sz="2000" dirty="0">
+              <a:rPr lang="en-US" sz="2200" dirty="0">
                 <a:solidFill>
                   <a:srgbClr val="1E2229"/>
                 </a:solidFill>
@@ -17373,7 +17373,7 @@
               </a:rPr>
               <a:t>Hitler and the Nazis hated democracy and the free, open society it had created in Germany.</a:t>
             </a:r>
-            <a:endParaRPr lang="en-US" sz="2000" dirty="0"/>
+            <a:endParaRPr lang="en-US" sz="2200" dirty="0"/>
           </a:p>
         </p:txBody>
       </p:sp>
@@ -17483,7 +17483,7 @@
               <a:buNone/>
             </a:pPr>
             <a:r>
-              <a:rPr lang="en-US" sz="2000" dirty="0">
+              <a:rPr lang="en-US" sz="2200" dirty="0">
                 <a:solidFill>
                   <a:srgbClr val="1E2229"/>
                 </a:solidFill>
@@ -17491,9 +17491,9 @@
                 <a:ea typeface="Calibri" pitchFamily="34" charset="-122"/>
                 <a:cs typeface="Calibri" pitchFamily="34" charset="-120"/>
               </a:rPr>
-              <a:t>The plan from then on was the one your lesson puts in a single sentence: use the democratic system to gain power, and then destroy German democracy from the inside.</a:t>
-            </a:r>
-            <a:endParaRPr lang="en-US" sz="2000" dirty="0"/>
+              <a:t>The plan from then on was the one your lesson puts in a single sentence: win power by election, and then pull German democracy down from within.</a:t>
+            </a:r>
+            <a:endParaRPr lang="en-US" sz="2200" dirty="0"/>
           </a:p>
         </p:txBody>
       </p:sp>
@@ -17603,7 +17603,7 @@
               <a:buNone/>
             </a:pPr>
             <a:r>
-              <a:rPr lang="en-US" sz="2000" dirty="0">
+              <a:rPr lang="en-US" sz="2200" dirty="0">
                 <a:solidFill>
                   <a:srgbClr val="1E2229"/>
                 </a:solidFill>
@@ -17613,7 +17613,7 @@
               </a:rPr>
               <a:t>By the start of 1933 the Nazis had become so popular, and the other parties so unpopular, that Germany's political leaders felt they had no choice but to let Hitler in.</a:t>
             </a:r>
-            <a:endParaRPr lang="en-US" sz="2000" dirty="0"/>
+            <a:endParaRPr lang="en-US" sz="2200" dirty="0"/>
           </a:p>
         </p:txBody>
       </p:sp>
